--- a/library/b02-design-thinking/b02-design-thinking.pptx
+++ b/library/b02-design-thinking/b02-design-thinking.pptx
@@ -2466,7 +2466,7 @@
                 <a:latin typeface="Noto Sans KR" pitchFamily="34" charset="0"/>
                 <a:ea typeface="Noto Sans KR" pitchFamily="34" charset="-122"/>
               </a:rPr>
-              <a:t>이 애 본</a:t>
+              <a:t>이애본</a:t>
             </a:r>
             <a:br>
               <a:rPr lang="en-US" altLang="ko-KR" sz="1500" b="1" dirty="0">
@@ -2485,7 +2485,7 @@
                 <a:latin typeface="Noto Sans KR" pitchFamily="34" charset="0"/>
                 <a:ea typeface="Noto Sans KR" pitchFamily="34" charset="-122"/>
               </a:rPr>
-              <a:t>한신대학교 </a:t>
+              <a:t>드림아이티비즈(DreamIT Biz)</a:t>
             </a:r>
             <a:r>
               <a:rPr lang="en-US" altLang="ko-KR" sz="1500" b="1" dirty="0">
@@ -2495,9 +2495,9 @@
                 <a:latin typeface="Noto Sans KR" pitchFamily="34" charset="0"/>
                 <a:ea typeface="Noto Sans KR" pitchFamily="34" charset="-122"/>
               </a:rPr>
-              <a:t>AI.SW</a:t>
-            </a:r>
-            <a:r>
+              <a:t/>
+            </a:r>
+            <a:br>
               <a:rPr lang="ko-KR" altLang="en-US" sz="1500" b="1" dirty="0">
                 <a:solidFill>
                   <a:srgbClr val="FFFFFF"/>
@@ -2505,8 +2505,7 @@
                 <a:latin typeface="Noto Sans KR" pitchFamily="34" charset="0"/>
                 <a:ea typeface="Noto Sans KR" pitchFamily="34" charset="-122"/>
               </a:rPr>
-              <a:t>대학 </a:t>
-            </a:r>
+            </a:br>
             <a:r>
               <a:rPr lang="en-US" altLang="ko-KR" sz="1500" b="1" dirty="0">
                 <a:solidFill>
@@ -2516,7 +2515,7 @@
                 <a:ea typeface="Noto Sans KR" pitchFamily="34" charset="-122"/>
                 <a:hlinkClick r:id="rId6"/>
               </a:rPr>
-              <a:t>aebon@hs.ac.kr</a:t>
+              <a:t>aebon@dreamitbiz.com</a:t>
             </a:r>
             <a:r>
               <a:rPr lang="ko-KR" altLang="en-US" sz="1500" b="1" dirty="0">
@@ -2572,7 +2571,7 @@
                 </a:solidFill>
                 <a:latin typeface="Pretendard"/>
               </a:rPr>
-              <a:t>© 2026 이애본(드림아이티비즈) · useful-ai.dreamitbiz.com · 교육 목적 비영리 이용 · 출처 표기</a:t>
+              <a:t>© 2026 이애본 · 홍문원(洪文院) 발행 · CC BY-NC-ND 4.0 · useful-ai.dreamitbiz.com</a:t>
             </a:r>
           </a:p>
         </p:txBody>
@@ -2804,45 +2803,6 @@
       </p:pic>
       <p:sp>
         <p:nvSpPr>
-          <p:cNvPr id="8" name="Text 5"/>
-          <p:cNvSpPr txBox="1"/>
-          <p:nvPr/>
-        </p:nvSpPr>
-        <p:spPr>
-          <a:xfrm>
-            <a:off x="11054182" y="571500"/>
-            <a:ext cx="663854" cy="228600"/>
-          </a:xfrm>
-          <a:prstGeom prst="rect">
-            <a:avLst/>
-          </a:prstGeom>
-          <a:noFill/>
-          <a:ln/>
-        </p:spPr>
-        <p:txBody>
-          <a:bodyPr wrap="square" lIns="0" tIns="0" rIns="0" bIns="0" rtlCol="0" anchor="ctr"/>
-          <a:lstStyle/>
-          <a:p>
-            <a:pPr marL="0" indent="0" algn="l">
-              <a:buNone/>
-            </a:pPr>
-            <a:r>
-              <a:rPr lang="en-US" sz="1200" dirty="0">
-                <a:solidFill>
-                  <a:srgbClr val="64748B"/>
-                </a:solidFill>
-                <a:latin typeface="Noto Sans KR" pitchFamily="34" charset="0"/>
-                <a:ea typeface="Noto Sans KR" pitchFamily="34" charset="-122"/>
-                <a:cs typeface="Noto Sans KR" pitchFamily="34" charset="-120"/>
-              </a:rPr>
-              <a:t>Page 10</a:t>
-            </a:r>
-            <a:endParaRPr lang="en-US" sz="1200" dirty="0"/>
-          </a:p>
-        </p:txBody>
-      </p:sp>
-      <p:sp>
-        <p:nvSpPr>
           <p:cNvPr id="9" name="Text 6"/>
           <p:cNvSpPr txBox="1"/>
           <p:nvPr/>
@@ -4319,7 +4279,7 @@
                 <a:ea typeface="Noto Sans KR" pitchFamily="34" charset="-122"/>
                 <a:cs typeface="Noto Sans KR" pitchFamily="34" charset="-120"/>
               </a:rPr>
-              <a:t>주의:</a:t>
+              <a:t>주의: </a:t>
             </a:r>
             <a:r>
               <a:rPr lang="en-US" sz="900" dirty="0">
@@ -4650,7 +4610,7 @@
                 </a:solidFill>
                 <a:latin typeface="Pretendard"/>
               </a:rPr>
-              <a:t>© 2026 이애본(드림아이티비즈) · useful-ai.dreamitbiz.com · 교육 목적 비영리 이용 · 출처 표기</a:t>
+              <a:t>© 2026 이애본 · 홍문원(洪文院) 발행 · CC BY-NC-ND 4.0 · useful-ai.dreamitbiz.com</a:t>
             </a:r>
           </a:p>
         </p:txBody>
@@ -8118,7 +8078,7 @@
                 </a:solidFill>
                 <a:latin typeface="Pretendard"/>
               </a:rPr>
-              <a:t>© 2026 이애본(드림아이티비즈) · useful-ai.dreamitbiz.com · 교육 목적 비영리 이용 · 출처 표기</a:t>
+              <a:t>© 2026 이애본 · 홍문원(洪文院) 발행 · CC BY-NC-ND 4.0 · useful-ai.dreamitbiz.com</a:t>
             </a:r>
           </a:p>
         </p:txBody>
@@ -8330,45 +8290,6 @@
       </p:sp>
       <p:sp>
         <p:nvSpPr>
-          <p:cNvPr id="7" name="Text 5"/>
-          <p:cNvSpPr txBox="1"/>
-          <p:nvPr/>
-        </p:nvSpPr>
-        <p:spPr>
-          <a:xfrm>
-            <a:off x="10863072" y="752551"/>
-            <a:ext cx="663854" cy="228600"/>
-          </a:xfrm>
-          <a:prstGeom prst="rect">
-            <a:avLst/>
-          </a:prstGeom>
-          <a:noFill/>
-          <a:ln/>
-        </p:spPr>
-        <p:txBody>
-          <a:bodyPr wrap="square" lIns="0" tIns="0" rIns="0" bIns="0" rtlCol="0" anchor="ctr"/>
-          <a:lstStyle/>
-          <a:p>
-            <a:pPr marL="0" indent="0" algn="l">
-              <a:buNone/>
-            </a:pPr>
-            <a:r>
-              <a:rPr lang="en-US" sz="1200" dirty="0">
-                <a:solidFill>
-                  <a:srgbClr val="64748B"/>
-                </a:solidFill>
-                <a:latin typeface="Noto Sans KR" pitchFamily="34" charset="0"/>
-                <a:ea typeface="Noto Sans KR" pitchFamily="34" charset="-122"/>
-                <a:cs typeface="Noto Sans KR" pitchFamily="34" charset="-120"/>
-              </a:rPr>
-              <a:t>Page 12</a:t>
-            </a:r>
-            <a:endParaRPr lang="en-US" sz="1200" dirty="0"/>
-          </a:p>
-        </p:txBody>
-      </p:sp>
-      <p:sp>
-        <p:nvSpPr>
           <p:cNvPr id="8" name="Shape 6"/>
           <p:cNvSpPr/>
           <p:nvPr/>
@@ -9897,7 +9818,7 @@
                 </a:solidFill>
                 <a:latin typeface="Pretendard"/>
               </a:rPr>
-              <a:t>© 2026 이애본(드림아이티비즈) · useful-ai.dreamitbiz.com · 교육 목적 비영리 이용 · 출처 표기</a:t>
+              <a:t>© 2026 이애본 · 홍문원(洪文院) 발행 · CC BY-NC-ND 4.0 · useful-ai.dreamitbiz.com</a:t>
             </a:r>
           </a:p>
         </p:txBody>
@@ -10109,45 +10030,6 @@
       </p:sp>
       <p:sp>
         <p:nvSpPr>
-          <p:cNvPr id="7" name="Text 5"/>
-          <p:cNvSpPr txBox="1"/>
-          <p:nvPr/>
-        </p:nvSpPr>
-        <p:spPr>
-          <a:xfrm>
-            <a:off x="10863072" y="780898"/>
-            <a:ext cx="663854" cy="228600"/>
-          </a:xfrm>
-          <a:prstGeom prst="rect">
-            <a:avLst/>
-          </a:prstGeom>
-          <a:noFill/>
-          <a:ln/>
-        </p:spPr>
-        <p:txBody>
-          <a:bodyPr wrap="square" lIns="0" tIns="0" rIns="0" bIns="0" rtlCol="0" anchor="ctr"/>
-          <a:lstStyle/>
-          <a:p>
-            <a:pPr marL="0" indent="0" algn="l">
-              <a:buNone/>
-            </a:pPr>
-            <a:r>
-              <a:rPr lang="en-US" sz="1200" dirty="0">
-                <a:solidFill>
-                  <a:srgbClr val="64748B"/>
-                </a:solidFill>
-                <a:latin typeface="Noto Sans KR" pitchFamily="34" charset="0"/>
-                <a:ea typeface="Noto Sans KR" pitchFamily="34" charset="-122"/>
-                <a:cs typeface="Noto Sans KR" pitchFamily="34" charset="-120"/>
-              </a:rPr>
-              <a:t>Page 13</a:t>
-            </a:r>
-            <a:endParaRPr lang="en-US" sz="1200" dirty="0"/>
-          </a:p>
-        </p:txBody>
-      </p:sp>
-      <p:sp>
-        <p:nvSpPr>
           <p:cNvPr id="8" name="Shape 6"/>
           <p:cNvSpPr/>
           <p:nvPr/>
@@ -12009,7 +11891,7 @@
                 </a:solidFill>
                 <a:latin typeface="Pretendard"/>
               </a:rPr>
-              <a:t>© 2026 이애본(드림아이티비즈) · useful-ai.dreamitbiz.com · 교육 목적 비영리 이용 · 출처 표기</a:t>
+              <a:t>© 2026 이애본 · 홍문원(洪文院) 발행 · CC BY-NC-ND 4.0 · useful-ai.dreamitbiz.com</a:t>
             </a:r>
           </a:p>
         </p:txBody>
@@ -12221,45 +12103,6 @@
       </p:sp>
       <p:sp>
         <p:nvSpPr>
-          <p:cNvPr id="7" name="Text 5"/>
-          <p:cNvSpPr txBox="1"/>
-          <p:nvPr/>
-        </p:nvSpPr>
-        <p:spPr>
-          <a:xfrm>
-            <a:off x="10959084" y="752551"/>
-            <a:ext cx="663854" cy="228600"/>
-          </a:xfrm>
-          <a:prstGeom prst="rect">
-            <a:avLst/>
-          </a:prstGeom>
-          <a:noFill/>
-          <a:ln/>
-        </p:spPr>
-        <p:txBody>
-          <a:bodyPr wrap="square" lIns="0" tIns="0" rIns="0" bIns="0" rtlCol="0" anchor="ctr"/>
-          <a:lstStyle/>
-          <a:p>
-            <a:pPr marL="0" indent="0" algn="l">
-              <a:buNone/>
-            </a:pPr>
-            <a:r>
-              <a:rPr lang="en-US" sz="1200" dirty="0">
-                <a:solidFill>
-                  <a:srgbClr val="64748B"/>
-                </a:solidFill>
-                <a:latin typeface="Noto Sans KR" pitchFamily="34" charset="0"/>
-                <a:ea typeface="Noto Sans KR" pitchFamily="34" charset="-122"/>
-                <a:cs typeface="Noto Sans KR" pitchFamily="34" charset="-120"/>
-              </a:rPr>
-              <a:t>Page 14</a:t>
-            </a:r>
-            <a:endParaRPr lang="en-US" sz="1200" dirty="0"/>
-          </a:p>
-        </p:txBody>
-      </p:sp>
-      <p:sp>
-        <p:nvSpPr>
           <p:cNvPr id="8" name="Shape 6"/>
           <p:cNvSpPr/>
           <p:nvPr/>
@@ -13123,7 +12966,7 @@
         <p:spPr>
           <a:xfrm>
             <a:off x="666598" y="5333695"/>
-            <a:ext cx="5391302" cy="1047902"/>
+            <a:ext cx="5391302" cy="1247902"/>
           </a:xfrm>
           <a:prstGeom prst="roundRect">
             <a:avLst>
@@ -13307,7 +13150,7 @@
                 <a:ea typeface="Noto Sans KR" pitchFamily="34" charset="-122"/>
                 <a:cs typeface="Noto Sans KR" pitchFamily="34" charset="-120"/>
               </a:rPr>
-              <a:t>Stanford d.school - Design Thinking Bootleg</a:t>
+              <a:t>Stanford d.school - Design Thinking Bootleg (5단계)</a:t>
             </a:r>
             <a:endParaRPr lang="en-US" sz="1000" dirty="0"/>
           </a:p>
@@ -13315,73 +13158,14 @@
       </p:sp>
       <p:sp>
         <p:nvSpPr>
-          <p:cNvPr id="40" name="Shape 28"/>
-          <p:cNvSpPr/>
-          <p:nvPr/>
-        </p:nvSpPr>
-        <p:spPr>
-          <a:xfrm>
-            <a:off x="6344107" y="5333695"/>
-            <a:ext cx="5181905" cy="1047902"/>
-          </a:xfrm>
-          <a:prstGeom prst="roundRect">
-            <a:avLst>
-              <a:gd name="adj" fmla="val 9519"/>
-            </a:avLst>
-          </a:prstGeom>
-          <a:solidFill>
-            <a:srgbClr val="3B82F6"/>
-          </a:solidFill>
-          <a:ln w="12700">
-            <a:solidFill>
-              <a:srgbClr val="FFFFFF">
-                <a:alpha val="0"/>
-              </a:srgbClr>
-            </a:solidFill>
-            <a:prstDash val="solid"/>
-          </a:ln>
-        </p:spPr>
-        <p:txBody>
-          <a:bodyPr/>
-          <a:lstStyle/>
-          <a:p>
-            <a:endParaRPr lang="ko-KR" altLang="en-US"/>
-          </a:p>
-        </p:txBody>
-      </p:sp>
-      <p:pic>
-        <p:nvPicPr>
-          <p:cNvPr id="41" name="Image 10" descr="preencoded.png"/>
-          <p:cNvPicPr>
-            <a:picLocks noChangeAspect="1"/>
-          </p:cNvPicPr>
-          <p:nvPr/>
-        </p:nvPicPr>
-        <p:blipFill>
-          <a:blip r:embed="rId9"/>
-          <a:srcRect l="-27" r="-27"/>
-          <a:stretch/>
-        </p:blipFill>
-        <p:spPr>
-          <a:xfrm>
-            <a:off x="8071409" y="5686654"/>
-            <a:ext cx="384803" cy="342900"/>
-          </a:xfrm>
-          <a:prstGeom prst="rect">
-            <a:avLst/>
-          </a:prstGeom>
-        </p:spPr>
-      </p:pic>
-      <p:sp>
-        <p:nvSpPr>
-          <p:cNvPr id="42" name="Text 29"/>
+          <p:cNvPr id="39" name="Text 27"/>
           <p:cNvSpPr txBox="1"/>
           <p:nvPr/>
         </p:nvSpPr>
         <p:spPr>
           <a:xfrm>
-            <a:off x="8642909" y="5529377"/>
-            <a:ext cx="1350569" cy="381305"/>
+            <a:off x="1114654" y="6233721"/>
+            <a:ext cx="5000000" cy="200254"/>
           </a:xfrm>
           <a:prstGeom prst="rect">
             <a:avLst/>
@@ -13397,64 +13181,23 @@
               <a:buNone/>
             </a:pPr>
             <a:r>
-              <a:rPr lang="en-US" sz="3000" b="1" kern="0" spc="150" dirty="0">
-                <a:solidFill>
-                  <a:srgbClr val="FFFFFF"/>
-                </a:solidFill>
-                <a:latin typeface="Noto Sans KR" pitchFamily="34" charset="0"/>
-                <a:ea typeface="Noto Sans KR" pitchFamily="34" charset="-122"/>
-                <a:cs typeface="Noto Sans KR" pitchFamily="34" charset="-120"/>
-              </a:rPr>
-              <a:t>Q &amp; A</a:t>
-            </a:r>
-            <a:endParaRPr lang="en-US" sz="3000" dirty="0"/>
-          </a:p>
-        </p:txBody>
-      </p:sp>
-      <p:sp>
-        <p:nvSpPr>
-          <p:cNvPr id="43" name="Text 30"/>
-          <p:cNvSpPr txBox="1"/>
-          <p:nvPr/>
-        </p:nvSpPr>
-        <p:spPr>
-          <a:xfrm>
-            <a:off x="8642909" y="5958230"/>
-            <a:ext cx="1300277" cy="228600"/>
-          </a:xfrm>
-          <a:prstGeom prst="rect">
-            <a:avLst/>
-          </a:prstGeom>
-          <a:noFill/>
-          <a:ln/>
-        </p:spPr>
-        <p:txBody>
-          <a:bodyPr wrap="square" lIns="0" tIns="0" rIns="0" bIns="0" rtlCol="0" anchor="ctr"/>
-          <a:lstStyle/>
-          <a:p>
-            <a:pPr marL="0" indent="0" algn="l">
-              <a:buNone/>
-            </a:pPr>
-            <a:r>
-              <a:rPr lang="en-US" sz="1200" dirty="0">
-                <a:solidFill>
-                  <a:srgbClr val="FFFFFF">
-                    <a:alpha val="90000"/>
-                  </a:srgbClr>
-                </a:solidFill>
-                <a:latin typeface="Noto Sans KR" pitchFamily="34" charset="0"/>
-                <a:ea typeface="Noto Sans KR" pitchFamily="34" charset="-122"/>
-                <a:cs typeface="Noto Sans KR" pitchFamily="34" charset="-120"/>
-              </a:rPr>
-              <a:t>질문 있으신가요?</a:t>
-            </a:r>
-            <a:endParaRPr lang="en-US" sz="1200" dirty="0"/>
-          </a:p>
-        </p:txBody>
-      </p:sp>
-      <p:sp>
-        <p:nvSpPr>
-          <p:cNvPr id="44" name="deckgen:wrap:footer"/>
+              <a:rPr lang="en-US" sz="1000" dirty="0">
+                <a:solidFill>
+                  <a:srgbClr val="64748B"/>
+                </a:solidFill>
+                <a:latin typeface="Noto Sans KR" pitchFamily="34" charset="0"/>
+                <a:ea typeface="Noto Sans KR" pitchFamily="34" charset="-122"/>
+                <a:cs typeface="Noto Sans KR" pitchFamily="34" charset="-120"/>
+              </a:rPr>
+              <a:t>Sarah Gibbons, "Design Thinking 101", Nielsen Norman Group (2016)</a:t>
+            </a:r>
+            <a:endParaRPr lang="en-US" sz="1000" dirty="0"/>
+          </a:p>
+        </p:txBody>
+      </p:sp>
+      <p:sp>
+        <p:nvSpPr>
+          <p:cNvPr id="40" name="deckgen:wrap:footer"/>
           <p:cNvSpPr txBox="1"/>
           <p:nvPr/>
         </p:nvSpPr>
@@ -13486,7 +13229,7 @@
                 </a:solidFill>
                 <a:latin typeface="Pretendard"/>
               </a:rPr>
-              <a:t>© 2026 이애본(드림아이티비즈) · useful-ai.dreamitbiz.com · 교육 목적 비영리 이용 · 출처 표기</a:t>
+              <a:t>© 2026 이애본 · 홍문원(洪文院) 발행 · CC BY-NC-ND 4.0 · useful-ai.dreamitbiz.com</a:t>
             </a:r>
           </a:p>
         </p:txBody>
@@ -13919,7 +13662,7 @@
                 <a:ea typeface="Noto Sans KR" pitchFamily="34" charset="-122"/>
                 <a:cs typeface="Noto Sans KR" pitchFamily="34" charset="-120"/>
               </a:rPr>
-              <a:t> </a:t>
+              <a:t> 다음 장과 같은 6단계(Gibbons, 2016)</a:t>
             </a:r>
             <a:r>
               <a:rPr lang="en-US" altLang="ko-KR" sz="1600" dirty="0" err="1">
@@ -13930,7 +13673,7 @@
                 <a:ea typeface="Noto Sans KR" pitchFamily="34" charset="-122"/>
                 <a:cs typeface="Noto Sans KR" pitchFamily="34" charset="-120"/>
               </a:rPr>
-              <a:t>아래와</a:t>
+              <a:t/>
             </a:r>
             <a:r>
               <a:rPr lang="en-US" altLang="ko-KR" sz="1600" dirty="0">
@@ -13941,7 +13684,7 @@
                 <a:ea typeface="Noto Sans KR" pitchFamily="34" charset="-122"/>
                 <a:cs typeface="Noto Sans KR" pitchFamily="34" charset="-120"/>
               </a:rPr>
-              <a:t> </a:t>
+              <a:t/>
             </a:r>
             <a:r>
               <a:rPr lang="en-US" altLang="ko-KR" sz="1600" dirty="0" err="1">
@@ -13952,7 +13695,7 @@
                 <a:ea typeface="Noto Sans KR" pitchFamily="34" charset="-122"/>
                 <a:cs typeface="Noto Sans KR" pitchFamily="34" charset="-120"/>
               </a:rPr>
-              <a:t>같은</a:t>
+              <a:t/>
             </a:r>
             <a:r>
               <a:rPr lang="en-US" altLang="ko-KR" sz="1600" dirty="0">
@@ -13963,7 +13706,7 @@
                 <a:ea typeface="Noto Sans KR" pitchFamily="34" charset="-122"/>
                 <a:cs typeface="Noto Sans KR" pitchFamily="34" charset="-120"/>
               </a:rPr>
-              <a:t> 6단계로 </a:t>
+              <a:t>로 </a:t>
             </a:r>
             <a:r>
               <a:rPr lang="en-US" altLang="ko-KR" sz="1600" dirty="0" err="1">
@@ -14511,7 +14254,7 @@
                 </a:solidFill>
                 <a:latin typeface="Pretendard"/>
               </a:rPr>
-              <a:t>© 2026 이애본(드림아이티비즈) · useful-ai.dreamitbiz.com · 교육 목적 비영리 이용 · 출처 표기</a:t>
+              <a:t>© 2026 이애본 · 홍문원(洪文院) 발행 · CC BY-NC-ND 4.0 · useful-ai.dreamitbiz.com</a:t>
             </a:r>
           </a:p>
         </p:txBody>
@@ -17020,51 +16763,6 @@
       </p:sp>
       <p:sp>
         <p:nvSpPr>
-          <p:cNvPr id="59" name="Text 57">
-            <a:extLst>
-              <a:ext uri="{FF2B5EF4-FFF2-40B4-BE49-F238E27FC236}">
-                <a16:creationId xmlns:a16="http://schemas.microsoft.com/office/drawing/2014/main" id="{B7F80267-B3DE-F73D-4EC3-DFC3F1AA5EB5}"/>
-              </a:ext>
-            </a:extLst>
-          </p:cNvPr>
-          <p:cNvSpPr txBox="1"/>
-          <p:nvPr/>
-        </p:nvSpPr>
-        <p:spPr>
-          <a:xfrm>
-            <a:off x="11124590" y="638251"/>
-            <a:ext cx="581558" cy="200254"/>
-          </a:xfrm>
-          <a:prstGeom prst="rect">
-            <a:avLst/>
-          </a:prstGeom>
-          <a:noFill/>
-          <a:ln/>
-        </p:spPr>
-        <p:txBody>
-          <a:bodyPr wrap="square" lIns="0" tIns="0" rIns="0" bIns="0" rtlCol="0" anchor="ctr"/>
-          <a:lstStyle/>
-          <a:p>
-            <a:pPr marL="0" indent="0" algn="l">
-              <a:buNone/>
-            </a:pPr>
-            <a:r>
-              <a:rPr lang="en-US" sz="1000" dirty="0">
-                <a:solidFill>
-                  <a:srgbClr val="64748B"/>
-                </a:solidFill>
-                <a:latin typeface="Noto Sans KR" pitchFamily="34" charset="0"/>
-                <a:ea typeface="Noto Sans KR" pitchFamily="34" charset="-122"/>
-                <a:cs typeface="Noto Sans KR" pitchFamily="34" charset="-120"/>
-              </a:rPr>
-              <a:t>Page 16</a:t>
-            </a:r>
-            <a:endParaRPr lang="en-US" sz="1000" dirty="0"/>
-          </a:p>
-        </p:txBody>
-      </p:sp>
-      <p:sp>
-        <p:nvSpPr>
           <p:cNvPr id="60" name="Shape 58">
             <a:extLst>
               <a:ext uri="{FF2B5EF4-FFF2-40B4-BE49-F238E27FC236}">
@@ -18774,7 +18472,7 @@
                 <a:ea typeface="Noto Sans KR" pitchFamily="34" charset="-122"/>
                 <a:cs typeface="Noto Sans KR" pitchFamily="34" charset="-120"/>
               </a:rPr>
-              <a:t>Realize</a:t>
+              <a:t>Implement</a:t>
             </a:r>
             <a:endParaRPr lang="en-US" sz="900" dirty="0"/>
           </a:p>
@@ -18782,7 +18480,43 @@
       </p:sp>
       <p:sp>
         <p:nvSpPr>
-          <p:cNvPr id="101" name="deckgen:wrap:footer"/>
+          <p:cNvPr id="101" name="Stage3 Note"/>
+          <p:cNvSpPr txBox="1"/>
+          <p:nvPr/>
+        </p:nvSpPr>
+        <p:spPr>
+          <a:xfrm>
+            <a:off x="571500" y="6500000"/>
+            <a:ext cx="11049000" cy="230000"/>
+          </a:xfrm>
+          <a:prstGeom prst="rect">
+            <a:avLst/>
+          </a:prstGeom>
+          <a:noFill/>
+        </p:spPr>
+        <p:txBody>
+          <a:bodyPr wrap="square" lIns="0" rIns="0" tIns="0" bIns="0" anchor="t">
+            <a:spAutoFit/>
+          </a:bodyPr>
+          <a:lstStyle/>
+          <a:p>
+            <a:r>
+              <a:rPr sz="900">
+                <a:solidFill>
+                  <a:srgbClr val="8B95A7"/>
+                </a:solidFill>
+                <a:latin typeface="Noto Sans KR"/>
+                <a:ea typeface="Noto Sans KR"/>
+                <a:cs typeface="Noto Sans KR"/>
+              </a:rPr>
+              <a:t>6단계 구성: Gibbons, S. (2016). Design thinking 101. Nielsen Norman Group. https://www.nngroup.com/articles/design-thinking/</a:t>
+            </a:r>
+          </a:p>
+        </p:txBody>
+      </p:sp>
+      <p:sp>
+        <p:nvSpPr>
+          <p:cNvPr id="102" name="deckgen:wrap:footer"/>
           <p:cNvSpPr txBox="1"/>
           <p:nvPr/>
         </p:nvSpPr>
@@ -18814,7 +18548,7 @@
                 </a:solidFill>
                 <a:latin typeface="Pretendard"/>
               </a:rPr>
-              <a:t>© 2026 이애본(드림아이티비즈) · useful-ai.dreamitbiz.com · 교육 목적 비영리 이용 · 출처 표기</a:t>
+              <a:t>© 2026 이애본 · 홍문원(洪文院) 발행 · CC BY-NC-ND 4.0 · useful-ai.dreamitbiz.com</a:t>
             </a:r>
           </a:p>
         </p:txBody>
@@ -19124,7 +18858,7 @@
                 </a:solidFill>
                 <a:latin typeface="Pretendard"/>
               </a:rPr>
-              <a:t>3.  출처 표기 예: 이애본(드림아이티비즈), 「자료 제목」, useful-ai.dreamitbiz.com</a:t>
+              <a:t>3.  출처 표기 예: 이애본(드림아이티비즈), 「자료 제목」, 홍문원, useful-ai.dreamitbiz.com, CC BY-NC-ND 4.0</a:t>
             </a:r>
           </a:p>
           <a:p>
@@ -19201,7 +18935,7 @@
                 </a:solidFill>
                 <a:latin typeface="Pretendard"/>
               </a:rPr>
-              <a:t>© 2026 이애본(드림아이티비즈) · useful-ai.dreamitbiz.com · 교육 목적 비영리 이용 · 출처 표기</a:t>
+              <a:t>© 2026 이애본 · 홍문원(洪文院) 발행 · CC BY-NC-ND 4.0 · useful-ai.dreamitbiz.com</a:t>
             </a:r>
           </a:p>
         </p:txBody>
@@ -19429,7 +19163,7 @@
                 </a:solidFill>
                 <a:latin typeface="Pretendard"/>
               </a:rPr>
-              <a:t>저작권 · 이용 조건</a:t>
+              <a:t>저작권 · 이용 조건 (CC BY-NC-ND 4.0)</a:t>
             </a:r>
           </a:p>
         </p:txBody>
@@ -19468,7 +19202,7 @@
                 </a:solidFill>
                 <a:latin typeface="Pretendard"/>
               </a:rPr>
-              <a:t>1.  저작권 © 2026 이애본(드림아이티비즈 DreamIT Biz). 2026년 1월 「생성형 AI와 창의력·복합문제능력 향상 과정」 강의안을 공개용으로 다시 묶은 것입니다.</a:t>
+              <a:t>1.  저작권 © 2026 이애본(드림아이티비즈 DreamIT Biz). 발행 홍문원(洪文院, 출판사 신고번호 제2026-000026호). 2026년 1월 「생성형 AI와 창의력·복합문제능력 향상 과정」 강의안을 전자출판용으로 다시 묶은 것입니다. ISBN: 등록 후 기재.</a:t>
             </a:r>
           </a:p>
           <a:p>
@@ -19487,7 +19221,7 @@
                 </a:solidFill>
                 <a:latin typeface="Pretendard"/>
               </a:rPr>
-              <a:t>2.  교육 목적의 비영리 이용을 허용합니다 — 출처를 표기해 주세요.</a:t>
+              <a:t>2.  이 자료는 크리에이티브 커먼즈 저작자표시-비영리-변경금지 4.0 국제(CC BY-NC-ND 4.0) 라이선스를 따릅니다. creativecommons.org/licenses/by-nc-nd/4.0/deed.ko</a:t>
             </a:r>
           </a:p>
           <a:p>
@@ -19506,7 +19240,7 @@
                 </a:solidFill>
                 <a:latin typeface="Pretendard"/>
               </a:rPr>
-              <a:t>3.  재배포·판매·변형(내용 수정 후 배포)은 허용하지 않습니다. 필요하면 먼저 문의해 주세요.</a:t>
+              <a:t>3.  저작자 표시(BY): 출처를 밝히면 그대로 복사해 수업·강의·자습에 쓸 수 있습니다. 비영리(NC): 유료 강의·판매·광고 수익 목적에는 쓸 수 없습니다. 변경금지(ND): 내용을 고치거나 잘라 재조합해 배포할 수 없습니다.</a:t>
             </a:r>
           </a:p>
           <a:p>
@@ -19544,7 +19278,7 @@
                 </a:solidFill>
                 <a:latin typeface="Pretendard"/>
               </a:rPr>
-              <a:t>5.  문의 aebon@dreamitbiz.com · 카카오톡 ID aebon</a:t>
+              <a:t>5.  라이선스 범위 밖의 이용(영리·변형·2차 저작)은 먼저 문의해 주세요. aebon@dreamitbiz.com · 카카오톡 ID aebon</a:t>
             </a:r>
           </a:p>
         </p:txBody>
@@ -19583,7 +19317,7 @@
                 </a:solidFill>
                 <a:latin typeface="Pretendard"/>
               </a:rPr>
-              <a:t>© 2026 이애본(드림아이티비즈) · useful-ai.dreamitbiz.com · 교육 목적 비영리 이용 · 출처 표기</a:t>
+              <a:t>© 2026 이애본 · 홍문원(洪文院) 발행 · CC BY-NC-ND 4.0 · useful-ai.dreamitbiz.com</a:t>
             </a:r>
           </a:p>
         </p:txBody>
@@ -19907,7 +19641,7 @@
                 </a:solidFill>
                 <a:latin typeface="Pretendard"/>
               </a:rPr>
-              <a:t>© 2026 이애본(드림아이티비즈). 교육 목적 비영리 이용 · 출처 표기</a:t>
+              <a:t>© 2026 이애본 · 발행 홍문원(洪文院) · CC BY-NC-ND 4.0</a:t>
             </a:r>
           </a:p>
         </p:txBody>
@@ -19946,7 +19680,7 @@
                 </a:solidFill>
                 <a:latin typeface="Pretendard"/>
               </a:rPr>
-              <a:t>© 2026 이애본(드림아이티비즈) · useful-ai.dreamitbiz.com · 교육 목적 비영리 이용 · 출처 표기</a:t>
+              <a:t>© 2026 이애본 · 홍문원(洪文院) 발행 · CC BY-NC-ND 4.0 · useful-ai.dreamitbiz.com</a:t>
             </a:r>
           </a:p>
         </p:txBody>
@@ -20158,45 +19892,6 @@
       </p:sp>
       <p:sp>
         <p:nvSpPr>
-          <p:cNvPr id="7" name="Text 5"/>
-          <p:cNvSpPr txBox="1"/>
-          <p:nvPr/>
-        </p:nvSpPr>
-        <p:spPr>
-          <a:xfrm>
-            <a:off x="10863072" y="1028700"/>
-            <a:ext cx="663854" cy="228600"/>
-          </a:xfrm>
-          <a:prstGeom prst="rect">
-            <a:avLst/>
-          </a:prstGeom>
-          <a:noFill/>
-          <a:ln/>
-        </p:spPr>
-        <p:txBody>
-          <a:bodyPr wrap="square" lIns="0" tIns="0" rIns="0" bIns="0" rtlCol="0" anchor="ctr"/>
-          <a:lstStyle/>
-          <a:p>
-            <a:pPr marL="0" indent="0" algn="l">
-              <a:buNone/>
-            </a:pPr>
-            <a:r>
-              <a:rPr lang="en-US" sz="1200" dirty="0">
-                <a:solidFill>
-                  <a:srgbClr val="64748B"/>
-                </a:solidFill>
-                <a:latin typeface="Noto Sans KR" pitchFamily="34" charset="0"/>
-                <a:ea typeface="Noto Sans KR" pitchFamily="34" charset="-122"/>
-                <a:cs typeface="Noto Sans KR" pitchFamily="34" charset="-120"/>
-              </a:rPr>
-              <a:t>Page 02</a:t>
-            </a:r>
-            <a:endParaRPr lang="en-US" sz="1200" dirty="0"/>
-          </a:p>
-        </p:txBody>
-      </p:sp>
-      <p:sp>
-        <p:nvSpPr>
           <p:cNvPr id="8" name="Shape 6"/>
           <p:cNvSpPr/>
           <p:nvPr/>
@@ -21397,106 +21092,6 @@
       </p:sp>
       <p:sp>
         <p:nvSpPr>
-          <p:cNvPr id="33" name="Shape 29"/>
-          <p:cNvSpPr/>
-          <p:nvPr/>
-        </p:nvSpPr>
-        <p:spPr>
-          <a:xfrm>
-            <a:off x="6610198" y="4095598"/>
-            <a:ext cx="62179" cy="57607"/>
-          </a:xfrm>
-          <a:prstGeom prst="ellipse">
-            <a:avLst/>
-          </a:prstGeom>
-          <a:solidFill>
-            <a:srgbClr val="7DD3FC"/>
-          </a:solidFill>
-          <a:ln w="12700">
-            <a:solidFill>
-              <a:srgbClr val="FFFFFF">
-                <a:alpha val="0"/>
-              </a:srgbClr>
-            </a:solidFill>
-            <a:prstDash val="solid"/>
-          </a:ln>
-        </p:spPr>
-        <p:txBody>
-          <a:bodyPr/>
-          <a:lstStyle/>
-          <a:p>
-            <a:endParaRPr lang="ko-KR" altLang="en-US" sz="2000"/>
-          </a:p>
-        </p:txBody>
-      </p:sp>
-      <p:sp>
-        <p:nvSpPr>
-          <p:cNvPr id="34" name="Text 30"/>
-          <p:cNvSpPr txBox="1"/>
-          <p:nvPr/>
-        </p:nvSpPr>
-        <p:spPr>
-          <a:xfrm>
-            <a:off x="6782105" y="4009644"/>
-            <a:ext cx="5123584" cy="505663"/>
-          </a:xfrm>
-          <a:prstGeom prst="rect">
-            <a:avLst/>
-          </a:prstGeom>
-          <a:noFill/>
-          <a:ln/>
-        </p:spPr>
-        <p:txBody>
-          <a:bodyPr wrap="square" lIns="0" tIns="0" rIns="0" bIns="0" rtlCol="0" anchor="t"/>
-          <a:lstStyle/>
-          <a:p>
-            <a:pPr marL="0" indent="0" algn="l">
-              <a:buNone/>
-            </a:pPr>
-            <a:r>
-              <a:rPr lang="en-US" sz="1400" b="1" dirty="0">
-                <a:solidFill>
-                  <a:srgbClr val="FFFFFF"/>
-                </a:solidFill>
-                <a:latin typeface="Noto Sans KR" pitchFamily="34" charset="0"/>
-                <a:ea typeface="Noto Sans KR" pitchFamily="34" charset="-122"/>
-                <a:cs typeface="Noto Sans KR" pitchFamily="34" charset="-120"/>
-              </a:rPr>
-              <a:t>타임박스 (75~90분) </a:t>
-            </a:r>
-          </a:p>
-          <a:p>
-            <a:pPr marL="0" indent="0" algn="l">
-              <a:buNone/>
-            </a:pPr>
-            <a:r>
-              <a:rPr lang="en-US" sz="1400" dirty="0" err="1">
-                <a:solidFill>
-                  <a:srgbClr val="CBD5E1"/>
-                </a:solidFill>
-                <a:latin typeface="Noto Sans KR" pitchFamily="34" charset="0"/>
-                <a:ea typeface="Noto Sans KR" pitchFamily="34" charset="-122"/>
-                <a:cs typeface="Noto Sans KR" pitchFamily="34" charset="-120"/>
-              </a:rPr>
-              <a:t>설명</a:t>
-            </a:r>
-            <a:r>
-              <a:rPr lang="en-US" sz="1400" dirty="0">
-                <a:solidFill>
-                  <a:srgbClr val="CBD5E1"/>
-                </a:solidFill>
-                <a:latin typeface="Noto Sans KR" pitchFamily="34" charset="0"/>
-                <a:ea typeface="Noto Sans KR" pitchFamily="34" charset="-122"/>
-                <a:cs typeface="Noto Sans KR" pitchFamily="34" charset="-120"/>
-              </a:rPr>
-              <a:t> 45분 + 실습/토론 30분 + Q&amp;A 5분</a:t>
-            </a:r>
-            <a:endParaRPr lang="en-US" sz="1400" dirty="0"/>
-          </a:p>
-        </p:txBody>
-      </p:sp>
-      <p:sp>
-        <p:nvSpPr>
           <p:cNvPr id="35" name="Text 31"/>
           <p:cNvSpPr txBox="1"/>
           <p:nvPr/>
@@ -21627,7 +21222,7 @@
                 </a:solidFill>
                 <a:latin typeface="Pretendard"/>
               </a:rPr>
-              <a:t>© 2026 이애본(드림아이티비즈) · useful-ai.dreamitbiz.com · 교육 목적 비영리 이용 · 출처 표기</a:t>
+              <a:t>© 2026 이애본 · 홍문원(洪文院) 발행 · CC BY-NC-ND 4.0 · useful-ai.dreamitbiz.com</a:t>
             </a:r>
           </a:p>
         </p:txBody>
@@ -21839,45 +21434,6 @@
       </p:sp>
       <p:sp>
         <p:nvSpPr>
-          <p:cNvPr id="7" name="Text 5"/>
-          <p:cNvSpPr txBox="1"/>
-          <p:nvPr/>
-        </p:nvSpPr>
-        <p:spPr>
-          <a:xfrm>
-            <a:off x="10982858" y="948233"/>
-            <a:ext cx="746150" cy="257861"/>
-          </a:xfrm>
-          <a:prstGeom prst="rect">
-            <a:avLst/>
-          </a:prstGeom>
-          <a:noFill/>
-          <a:ln/>
-        </p:spPr>
-        <p:txBody>
-          <a:bodyPr wrap="square" lIns="0" tIns="0" rIns="0" bIns="0" rtlCol="0" anchor="ctr"/>
-          <a:lstStyle/>
-          <a:p>
-            <a:pPr marL="0" indent="0" algn="l">
-              <a:buNone/>
-            </a:pPr>
-            <a:r>
-              <a:rPr lang="en-US" sz="1300" dirty="0">
-                <a:solidFill>
-                  <a:srgbClr val="64748B"/>
-                </a:solidFill>
-                <a:latin typeface="Noto Sans KR" pitchFamily="34" charset="0"/>
-                <a:ea typeface="Noto Sans KR" pitchFamily="34" charset="-122"/>
-                <a:cs typeface="Noto Sans KR" pitchFamily="34" charset="-120"/>
-              </a:rPr>
-              <a:t>Page 03</a:t>
-            </a:r>
-            <a:endParaRPr lang="en-US" sz="1300" dirty="0"/>
-          </a:p>
-        </p:txBody>
-      </p:sp>
-      <p:sp>
-        <p:nvSpPr>
           <p:cNvPr id="8" name="Shape 6"/>
           <p:cNvSpPr/>
           <p:nvPr/>
@@ -22278,29 +21834,7 @@
                 <a:ea typeface="Noto Serif KR" pitchFamily="34" charset="-122"/>
                 <a:cs typeface="Noto Serif KR" pitchFamily="34" charset="-120"/>
               </a:rPr>
-              <a:t>“혁신적인 비즈니스 전략을 수립하기 </a:t>
-            </a:r>
-            <a:r>
-              <a:rPr lang="en-US" sz="1800" b="1" dirty="0" err="1">
-                <a:solidFill>
-                  <a:srgbClr val="E2E8F0"/>
-                </a:solidFill>
-                <a:latin typeface="Noto Serif KR" pitchFamily="34" charset="0"/>
-                <a:ea typeface="Noto Serif KR" pitchFamily="34" charset="-122"/>
-                <a:cs typeface="Noto Serif KR" pitchFamily="34" charset="-120"/>
-              </a:rPr>
-              <a:t>위하여</a:t>
-            </a:r>
-            <a:r>
-              <a:rPr lang="en-US" sz="1800" b="1" dirty="0">
-                <a:solidFill>
-                  <a:srgbClr val="E2E8F0"/>
-                </a:solidFill>
-                <a:latin typeface="Noto Serif KR" pitchFamily="34" charset="0"/>
-                <a:ea typeface="Noto Serif KR" pitchFamily="34" charset="-122"/>
-                <a:cs typeface="Noto Serif KR" pitchFamily="34" charset="-120"/>
-              </a:rPr>
-              <a:t> </a:t>
+              <a:t>“사람들의 필요를 기술적으로 가능하고</a:t>
             </a:r>
           </a:p>
           <a:p>
@@ -22319,40 +21853,7 @@
                 <a:ea typeface="Noto Serif KR" pitchFamily="34" charset="-122"/>
                 <a:cs typeface="Noto Serif KR" pitchFamily="34" charset="-120"/>
               </a:rPr>
-              <a:t>디자인</a:t>
-            </a:r>
-            <a:r>
-              <a:rPr lang="en-US" sz="1800" b="1" dirty="0">
-                <a:solidFill>
-                  <a:srgbClr val="E2E8F0"/>
-                </a:solidFill>
-                <a:latin typeface="Noto Serif KR" pitchFamily="34" charset="0"/>
-                <a:ea typeface="Noto Serif KR" pitchFamily="34" charset="-122"/>
-                <a:cs typeface="Noto Serif KR" pitchFamily="34" charset="-120"/>
-              </a:rPr>
-              <a:t> 작업의 프로세스를 </a:t>
-            </a:r>
-            <a:r>
-              <a:rPr lang="en-US" sz="1800" b="1" dirty="0" err="1">
-                <a:solidFill>
-                  <a:srgbClr val="E2E8F0"/>
-                </a:solidFill>
-                <a:latin typeface="Noto Serif KR" pitchFamily="34" charset="0"/>
-                <a:ea typeface="Noto Serif KR" pitchFamily="34" charset="-122"/>
-                <a:cs typeface="Noto Serif KR" pitchFamily="34" charset="-120"/>
-              </a:rPr>
-              <a:t>활용하는</a:t>
-            </a:r>
-            <a:r>
-              <a:rPr lang="en-US" sz="1800" b="1" dirty="0">
-                <a:solidFill>
-                  <a:srgbClr val="E2E8F0"/>
-                </a:solidFill>
-                <a:latin typeface="Noto Serif KR" pitchFamily="34" charset="0"/>
-                <a:ea typeface="Noto Serif KR" pitchFamily="34" charset="-122"/>
-                <a:cs typeface="Noto Serif KR" pitchFamily="34" charset="-120"/>
-              </a:rPr>
-              <a:t> </a:t>
+              <a:t>사업으로 고객 가치가 될 수 있는 것과</a:t>
             </a:r>
           </a:p>
           <a:p>
@@ -22371,18 +21872,7 @@
                 <a:ea typeface="Noto Serif KR" pitchFamily="34" charset="-122"/>
                 <a:cs typeface="Noto Serif KR" pitchFamily="34" charset="-120"/>
               </a:rPr>
-              <a:t>창의적</a:t>
-            </a:r>
-            <a:r>
-              <a:rPr lang="en-US" sz="1800" b="1" dirty="0">
-                <a:solidFill>
-                  <a:srgbClr val="E2E8F0"/>
-                </a:solidFill>
-                <a:latin typeface="Noto Serif KR" pitchFamily="34" charset="0"/>
-                <a:ea typeface="Noto Serif KR" pitchFamily="34" charset="-122"/>
-                <a:cs typeface="Noto Serif KR" pitchFamily="34" charset="-120"/>
-              </a:rPr>
-              <a:t> · 융합적 사고방식”</a:t>
+              <a:t>맞춰 내는, 디자이너의 방법” (Brown, 2008)</a:t>
             </a:r>
             <a:endParaRPr lang="en-US" sz="1800" dirty="0"/>
           </a:p>
@@ -22424,29 +21914,7 @@
                 <a:ea typeface="Noto Serif KR" pitchFamily="34" charset="-122"/>
                 <a:cs typeface="Noto Serif KR" pitchFamily="34" charset="-120"/>
               </a:rPr>
-              <a:t>“사람 중심의 공감을 </a:t>
-            </a:r>
-            <a:r>
-              <a:rPr lang="en-US" sz="1800" b="1" dirty="0" err="1">
-                <a:solidFill>
-                  <a:srgbClr val="E2E8F0"/>
-                </a:solidFill>
-                <a:latin typeface="Noto Serif KR" pitchFamily="34" charset="0"/>
-                <a:ea typeface="Noto Serif KR" pitchFamily="34" charset="-122"/>
-                <a:cs typeface="Noto Serif KR" pitchFamily="34" charset="-120"/>
-              </a:rPr>
-              <a:t>통해</a:t>
-            </a:r>
-            <a:r>
-              <a:rPr lang="en-US" sz="1800" b="1" dirty="0">
-                <a:solidFill>
-                  <a:srgbClr val="E2E8F0"/>
-                </a:solidFill>
-                <a:latin typeface="Noto Serif KR" pitchFamily="34" charset="0"/>
-                <a:ea typeface="Noto Serif KR" pitchFamily="34" charset="-122"/>
-                <a:cs typeface="Noto Serif KR" pitchFamily="34" charset="-120"/>
-              </a:rPr>
-              <a:t> </a:t>
+              <a:t>“사람 중심으로 직접 해 보며 문제를 풀면</a:t>
             </a:r>
           </a:p>
           <a:p>
@@ -22465,40 +21933,7 @@
                 <a:ea typeface="Noto Serif KR" pitchFamily="34" charset="-122"/>
                 <a:cs typeface="Noto Serif KR" pitchFamily="34" charset="-120"/>
               </a:rPr>
-              <a:t>새롭게</a:t>
-            </a:r>
-            <a:r>
-              <a:rPr lang="en-US" sz="1800" b="1" dirty="0">
-                <a:solidFill>
-                  <a:srgbClr val="E2E8F0"/>
-                </a:solidFill>
-                <a:latin typeface="Noto Serif KR" pitchFamily="34" charset="0"/>
-                <a:ea typeface="Noto Serif KR" pitchFamily="34" charset="-122"/>
-                <a:cs typeface="Noto Serif KR" pitchFamily="34" charset="-120"/>
-              </a:rPr>
-              <a:t> 문제점을 해석하고 </a:t>
-            </a:r>
-            <a:r>
-              <a:rPr lang="en-US" sz="1800" b="1" dirty="0" err="1">
-                <a:solidFill>
-                  <a:srgbClr val="E2E8F0"/>
-                </a:solidFill>
-                <a:latin typeface="Noto Serif KR" pitchFamily="34" charset="0"/>
-                <a:ea typeface="Noto Serif KR" pitchFamily="34" charset="-122"/>
-                <a:cs typeface="Noto Serif KR" pitchFamily="34" charset="-120"/>
-              </a:rPr>
-              <a:t>풀어내어</a:t>
-            </a:r>
-            <a:r>
-              <a:rPr lang="en-US" sz="1800" b="1" dirty="0">
-                <a:solidFill>
-                  <a:srgbClr val="E2E8F0"/>
-                </a:solidFill>
-                <a:latin typeface="Noto Serif KR" pitchFamily="34" charset="0"/>
-                <a:ea typeface="Noto Serif KR" pitchFamily="34" charset="-122"/>
-                <a:cs typeface="Noto Serif KR" pitchFamily="34" charset="-120"/>
-              </a:rPr>
-              <a:t> </a:t>
+              <a:t>혁신이 생기고, 혁신은 차별화와</a:t>
             </a:r>
           </a:p>
           <a:p>
@@ -22517,18 +21952,7 @@
                 <a:ea typeface="Noto Serif KR" pitchFamily="34" charset="-122"/>
                 <a:cs typeface="Noto Serif KR" pitchFamily="34" charset="-120"/>
               </a:rPr>
-              <a:t>창의적인</a:t>
-            </a:r>
-            <a:r>
-              <a:rPr lang="en-US" sz="1800" b="1" dirty="0">
-                <a:solidFill>
-                  <a:srgbClr val="E2E8F0"/>
-                </a:solidFill>
-                <a:latin typeface="Noto Serif KR" pitchFamily="34" charset="0"/>
-                <a:ea typeface="Noto Serif KR" pitchFamily="34" charset="-122"/>
-                <a:cs typeface="Noto Serif KR" pitchFamily="34" charset="-120"/>
-              </a:rPr>
-              <a:t> 혁신을 촉진하는 그로스 마인드셋”</a:t>
+              <a:t>경쟁 우위로 이어진다는 생각” (Gibbons, 2016)</a:t>
             </a:r>
             <a:endParaRPr lang="en-US" sz="1800" dirty="0"/>
           </a:p>
@@ -22536,7 +21960,43 @@
       </p:sp>
       <p:sp>
         <p:nvSpPr>
-          <p:cNvPr id="22" name="deckgen:wrap:footer"/>
+          <p:cNvPr id="22" name="Stage3 Note"/>
+          <p:cNvSpPr txBox="1"/>
+          <p:nvPr/>
+        </p:nvSpPr>
+        <p:spPr>
+          <a:xfrm>
+            <a:off x="571500" y="6460000"/>
+            <a:ext cx="11049000" cy="300000"/>
+          </a:xfrm>
+          <a:prstGeom prst="rect">
+            <a:avLst/>
+          </a:prstGeom>
+          <a:noFill/>
+        </p:spPr>
+        <p:txBody>
+          <a:bodyPr wrap="square" lIns="0" rIns="0" tIns="0" bIns="0" anchor="t">
+            <a:spAutoFit/>
+          </a:bodyPr>
+          <a:lstStyle/>
+          <a:p>
+            <a:r>
+              <a:rPr sz="900">
+                <a:solidFill>
+                  <a:srgbClr val="8B95A7"/>
+                </a:solidFill>
+                <a:latin typeface="Noto Sans KR"/>
+                <a:ea typeface="Noto Sans KR"/>
+                <a:cs typeface="Noto Sans KR"/>
+              </a:rPr>
+              <a:t>Brown, T. (2008). Design thinking. Harvard Business Review, 86(6), 84–92.  ·  Gibbons, S. (2016). Design thinking 101. Nielsen Norman Group. https://www.nngroup.com/articles/design-thinking/</a:t>
+            </a:r>
+          </a:p>
+        </p:txBody>
+      </p:sp>
+      <p:sp>
+        <p:nvSpPr>
+          <p:cNvPr id="23" name="deckgen:wrap:footer"/>
           <p:cNvSpPr txBox="1"/>
           <p:nvPr/>
         </p:nvSpPr>
@@ -22568,7 +22028,7 @@
                 </a:solidFill>
                 <a:latin typeface="Pretendard"/>
               </a:rPr>
-              <a:t>© 2026 이애본(드림아이티비즈) · useful-ai.dreamitbiz.com · 교육 목적 비영리 이용 · 출처 표기</a:t>
+              <a:t>© 2026 이애본 · 홍문원(洪文院) 발행 · CC BY-NC-ND 4.0 · useful-ai.dreamitbiz.com</a:t>
             </a:r>
           </a:p>
         </p:txBody>
@@ -22733,7 +22193,7 @@
                 <a:ea typeface="Noto Sans KR" pitchFamily="34" charset="-122"/>
                 <a:cs typeface="Noto Sans KR" pitchFamily="34" charset="-120"/>
               </a:rPr>
-              <a:t>Agenda &amp; Timebox</a:t>
+              <a:t>Agenda</a:t>
             </a:r>
             <a:endParaRPr lang="en-US" sz="1300" dirty="0"/>
           </a:p>
@@ -22772,7 +22232,7 @@
                 <a:ea typeface="Noto Sans KR" pitchFamily="34" charset="-122"/>
                 <a:cs typeface="Noto Sans KR" pitchFamily="34" charset="-120"/>
               </a:rPr>
-              <a:t>강의 </a:t>
+              <a:t>학습 흐름</a:t>
             </a:r>
             <a:r>
               <a:rPr lang="en-US" sz="2800" b="1" dirty="0" err="1">
@@ -22783,7 +22243,7 @@
                 <a:ea typeface="Noto Sans KR" pitchFamily="34" charset="-122"/>
                 <a:cs typeface="Noto Sans KR" pitchFamily="34" charset="-120"/>
               </a:rPr>
-              <a:t>타임박스</a:t>
+              <a:t/>
             </a:r>
             <a:r>
               <a:rPr lang="en-US" sz="2800" b="1" dirty="0">
@@ -22794,48 +22254,9 @@
                 <a:ea typeface="Noto Sans KR" pitchFamily="34" charset="-122"/>
                 <a:cs typeface="Noto Sans KR" pitchFamily="34" charset="-120"/>
               </a:rPr>
-              <a:t> (75~90분)</a:t>
+              <a:t/>
             </a:r>
             <a:endParaRPr lang="en-US" sz="2800" dirty="0"/>
-          </a:p>
-        </p:txBody>
-      </p:sp>
-      <p:sp>
-        <p:nvSpPr>
-          <p:cNvPr id="7" name="Text 5"/>
-          <p:cNvSpPr txBox="1"/>
-          <p:nvPr/>
-        </p:nvSpPr>
-        <p:spPr>
-          <a:xfrm>
-            <a:off x="10792663" y="724205"/>
-            <a:ext cx="746150" cy="257861"/>
-          </a:xfrm>
-          <a:prstGeom prst="rect">
-            <a:avLst/>
-          </a:prstGeom>
-          <a:noFill/>
-          <a:ln/>
-        </p:spPr>
-        <p:txBody>
-          <a:bodyPr wrap="square" lIns="0" tIns="0" rIns="0" bIns="0" rtlCol="0" anchor="ctr"/>
-          <a:lstStyle/>
-          <a:p>
-            <a:pPr marL="0" indent="0" algn="l">
-              <a:buNone/>
-            </a:pPr>
-            <a:r>
-              <a:rPr lang="en-US" sz="1300" dirty="0">
-                <a:solidFill>
-                  <a:srgbClr val="64748B"/>
-                </a:solidFill>
-                <a:latin typeface="Noto Sans KR" pitchFamily="34" charset="0"/>
-                <a:ea typeface="Noto Sans KR" pitchFamily="34" charset="-122"/>
-                <a:cs typeface="Noto Sans KR" pitchFamily="34" charset="-120"/>
-              </a:rPr>
-              <a:t>Page 04</a:t>
-            </a:r>
-            <a:endParaRPr lang="en-US" sz="1300" dirty="0"/>
           </a:p>
         </p:txBody>
       </p:sp>
@@ -22999,7 +22420,7 @@
                 <a:ea typeface="Noto Sans KR" pitchFamily="34" charset="-122"/>
                 <a:cs typeface="Noto Sans KR" pitchFamily="34" charset="-120"/>
               </a:rPr>
-              <a:t>진행 순서 (Time Schedule)</a:t>
+              <a:t>진행 순서</a:t>
             </a:r>
             <a:endParaRPr lang="en-US" sz="1600" dirty="0"/>
           </a:p>
@@ -23043,44 +22464,6 @@
       </p:sp>
       <p:sp>
         <p:nvSpPr>
-          <p:cNvPr id="14" name="Shape 11"/>
-          <p:cNvSpPr/>
-          <p:nvPr/>
-        </p:nvSpPr>
-        <p:spPr>
-          <a:xfrm>
-            <a:off x="1028700" y="2419502"/>
-            <a:ext cx="857707" cy="295351"/>
-          </a:xfrm>
-          <a:prstGeom prst="roundRect">
-            <a:avLst>
-              <a:gd name="adj" fmla="val 59922"/>
-            </a:avLst>
-          </a:prstGeom>
-          <a:solidFill>
-            <a:srgbClr val="3B82F6">
-              <a:alpha val="10000"/>
-            </a:srgbClr>
-          </a:solidFill>
-          <a:ln w="12700">
-            <a:solidFill>
-              <a:srgbClr val="FFFFFF">
-                <a:alpha val="0"/>
-              </a:srgbClr>
-            </a:solidFill>
-            <a:prstDash val="solid"/>
-          </a:ln>
-        </p:spPr>
-        <p:txBody>
-          <a:bodyPr/>
-          <a:lstStyle/>
-          <a:p>
-            <a:endParaRPr lang="ko-KR" altLang="en-US"/>
-          </a:p>
-        </p:txBody>
-      </p:sp>
-      <p:sp>
-        <p:nvSpPr>
           <p:cNvPr id="15" name="Text 12"/>
           <p:cNvSpPr txBox="1"/>
           <p:nvPr/>
@@ -23195,44 +22578,6 @@
       </p:sp>
       <p:sp>
         <p:nvSpPr>
-          <p:cNvPr id="18" name="Shape 15"/>
-          <p:cNvSpPr/>
-          <p:nvPr/>
-        </p:nvSpPr>
-        <p:spPr>
-          <a:xfrm>
-            <a:off x="1028700" y="3066898"/>
-            <a:ext cx="857707" cy="295351"/>
-          </a:xfrm>
-          <a:prstGeom prst="roundRect">
-            <a:avLst>
-              <a:gd name="adj" fmla="val 59922"/>
-            </a:avLst>
-          </a:prstGeom>
-          <a:solidFill>
-            <a:srgbClr val="3B82F6">
-              <a:alpha val="10000"/>
-            </a:srgbClr>
-          </a:solidFill>
-          <a:ln w="12700">
-            <a:solidFill>
-              <a:srgbClr val="FFFFFF">
-                <a:alpha val="0"/>
-              </a:srgbClr>
-            </a:solidFill>
-            <a:prstDash val="solid"/>
-          </a:ln>
-        </p:spPr>
-        <p:txBody>
-          <a:bodyPr/>
-          <a:lstStyle/>
-          <a:p>
-            <a:endParaRPr lang="ko-KR" altLang="en-US"/>
-          </a:p>
-        </p:txBody>
-      </p:sp>
-      <p:sp>
-        <p:nvSpPr>
           <p:cNvPr id="19" name="Text 16"/>
           <p:cNvSpPr txBox="1"/>
           <p:nvPr/>
@@ -23347,44 +22692,6 @@
       </p:sp>
       <p:sp>
         <p:nvSpPr>
-          <p:cNvPr id="22" name="Shape 19"/>
-          <p:cNvSpPr/>
-          <p:nvPr/>
-        </p:nvSpPr>
-        <p:spPr>
-          <a:xfrm>
-            <a:off x="1028700" y="3715207"/>
-            <a:ext cx="857707" cy="295351"/>
-          </a:xfrm>
-          <a:prstGeom prst="roundRect">
-            <a:avLst>
-              <a:gd name="adj" fmla="val 59922"/>
-            </a:avLst>
-          </a:prstGeom>
-          <a:solidFill>
-            <a:srgbClr val="3B82F6">
-              <a:alpha val="10000"/>
-            </a:srgbClr>
-          </a:solidFill>
-          <a:ln w="12700">
-            <a:solidFill>
-              <a:srgbClr val="FFFFFF">
-                <a:alpha val="0"/>
-              </a:srgbClr>
-            </a:solidFill>
-            <a:prstDash val="solid"/>
-          </a:ln>
-        </p:spPr>
-        <p:txBody>
-          <a:bodyPr/>
-          <a:lstStyle/>
-          <a:p>
-            <a:endParaRPr lang="ko-KR" altLang="en-US"/>
-          </a:p>
-        </p:txBody>
-      </p:sp>
-      <p:sp>
-        <p:nvSpPr>
           <p:cNvPr id="23" name="Text 20"/>
           <p:cNvSpPr txBox="1"/>
           <p:nvPr/>
@@ -23499,44 +22806,6 @@
       </p:sp>
       <p:sp>
         <p:nvSpPr>
-          <p:cNvPr id="26" name="Shape 23"/>
-          <p:cNvSpPr/>
-          <p:nvPr/>
-        </p:nvSpPr>
-        <p:spPr>
-          <a:xfrm>
-            <a:off x="1028700" y="4362602"/>
-            <a:ext cx="857707" cy="295351"/>
-          </a:xfrm>
-          <a:prstGeom prst="roundRect">
-            <a:avLst>
-              <a:gd name="adj" fmla="val 59922"/>
-            </a:avLst>
-          </a:prstGeom>
-          <a:solidFill>
-            <a:srgbClr val="3B82F6">
-              <a:alpha val="10000"/>
-            </a:srgbClr>
-          </a:solidFill>
-          <a:ln w="12700">
-            <a:solidFill>
-              <a:srgbClr val="FFFFFF">
-                <a:alpha val="0"/>
-              </a:srgbClr>
-            </a:solidFill>
-            <a:prstDash val="solid"/>
-          </a:ln>
-        </p:spPr>
-        <p:txBody>
-          <a:bodyPr/>
-          <a:lstStyle/>
-          <a:p>
-            <a:endParaRPr lang="ko-KR" altLang="en-US"/>
-          </a:p>
-        </p:txBody>
-      </p:sp>
-      <p:sp>
-        <p:nvSpPr>
           <p:cNvPr id="27" name="Text 24"/>
           <p:cNvSpPr txBox="1"/>
           <p:nvPr/>
@@ -23610,44 +22879,6 @@
               <a:t>조별 결과 공유 및 핵심 내용 리마인드</a:t>
             </a:r>
             <a:endParaRPr lang="en-US" sz="1100" dirty="0"/>
-          </a:p>
-        </p:txBody>
-      </p:sp>
-      <p:sp>
-        <p:nvSpPr>
-          <p:cNvPr id="29" name="Shape 26"/>
-          <p:cNvSpPr/>
-          <p:nvPr/>
-        </p:nvSpPr>
-        <p:spPr>
-          <a:xfrm>
-            <a:off x="1028700" y="5009998"/>
-            <a:ext cx="857707" cy="295351"/>
-          </a:xfrm>
-          <a:prstGeom prst="roundRect">
-            <a:avLst>
-              <a:gd name="adj" fmla="val 59922"/>
-            </a:avLst>
-          </a:prstGeom>
-          <a:solidFill>
-            <a:srgbClr val="3B82F6">
-              <a:alpha val="10000"/>
-            </a:srgbClr>
-          </a:solidFill>
-          <a:ln w="12700">
-            <a:solidFill>
-              <a:srgbClr val="FFFFFF">
-                <a:alpha val="0"/>
-              </a:srgbClr>
-            </a:solidFill>
-            <a:prstDash val="solid"/>
-          </a:ln>
-        </p:spPr>
-        <p:txBody>
-          <a:bodyPr/>
-          <a:lstStyle/>
-          <a:p>
-            <a:endParaRPr lang="ko-KR" altLang="en-US"/>
           </a:p>
         </p:txBody>
       </p:sp>
@@ -24379,202 +23610,7 @@
       </p:sp>
       <p:sp>
         <p:nvSpPr>
-          <p:cNvPr id="51" name="Text 43"/>
-          <p:cNvSpPr txBox="1"/>
-          <p:nvPr/>
-        </p:nvSpPr>
-        <p:spPr>
-          <a:xfrm>
-            <a:off x="1200607" y="2457907"/>
-            <a:ext cx="514807" cy="200254"/>
-          </a:xfrm>
-          <a:prstGeom prst="rect">
-            <a:avLst/>
-          </a:prstGeom>
-          <a:noFill/>
-          <a:ln/>
-        </p:spPr>
-        <p:txBody>
-          <a:bodyPr wrap="square" lIns="0" tIns="0" rIns="0" bIns="0" rtlCol="0" anchor="ctr"/>
-          <a:lstStyle/>
-          <a:p>
-            <a:pPr marL="0" indent="0" algn="ctr">
-              <a:buNone/>
-            </a:pPr>
-            <a:r>
-              <a:rPr lang="en-US" sz="1100" b="1" dirty="0">
-                <a:solidFill>
-                  <a:srgbClr val="60A5FA"/>
-                </a:solidFill>
-                <a:latin typeface="Noto Sans KR" pitchFamily="34" charset="0"/>
-                <a:ea typeface="Noto Sans KR" pitchFamily="34" charset="-122"/>
-                <a:cs typeface="Noto Sans KR" pitchFamily="34" charset="-120"/>
-              </a:rPr>
-              <a:t>0-15분</a:t>
-            </a:r>
-            <a:endParaRPr lang="en-US" sz="1100" dirty="0"/>
-          </a:p>
-        </p:txBody>
-      </p:sp>
-      <p:sp>
-        <p:nvSpPr>
-          <p:cNvPr id="52" name="Text 44"/>
-          <p:cNvSpPr txBox="1"/>
-          <p:nvPr/>
-        </p:nvSpPr>
-        <p:spPr>
-          <a:xfrm>
-            <a:off x="1155802" y="3105302"/>
-            <a:ext cx="606247" cy="200254"/>
-          </a:xfrm>
-          <a:prstGeom prst="rect">
-            <a:avLst/>
-          </a:prstGeom>
-          <a:noFill/>
-          <a:ln/>
-        </p:spPr>
-        <p:txBody>
-          <a:bodyPr wrap="square" lIns="0" tIns="0" rIns="0" bIns="0" rtlCol="0" anchor="ctr"/>
-          <a:lstStyle/>
-          <a:p>
-            <a:pPr marL="0" indent="0" algn="ctr">
-              <a:buNone/>
-            </a:pPr>
-            <a:r>
-              <a:rPr lang="en-US" sz="1100" b="1" dirty="0">
-                <a:solidFill>
-                  <a:srgbClr val="60A5FA"/>
-                </a:solidFill>
-                <a:latin typeface="Noto Sans KR" pitchFamily="34" charset="0"/>
-                <a:ea typeface="Noto Sans KR" pitchFamily="34" charset="-122"/>
-                <a:cs typeface="Noto Sans KR" pitchFamily="34" charset="-120"/>
-              </a:rPr>
-              <a:t>15-40분</a:t>
-            </a:r>
-            <a:endParaRPr lang="en-US" sz="1100" dirty="0"/>
-          </a:p>
-        </p:txBody>
-      </p:sp>
-      <p:sp>
-        <p:nvSpPr>
-          <p:cNvPr id="53" name="Text 45"/>
-          <p:cNvSpPr txBox="1"/>
-          <p:nvPr/>
-        </p:nvSpPr>
-        <p:spPr>
-          <a:xfrm>
-            <a:off x="1155802" y="3752698"/>
-            <a:ext cx="606247" cy="200254"/>
-          </a:xfrm>
-          <a:prstGeom prst="rect">
-            <a:avLst/>
-          </a:prstGeom>
-          <a:noFill/>
-          <a:ln/>
-        </p:spPr>
-        <p:txBody>
-          <a:bodyPr wrap="square" lIns="0" tIns="0" rIns="0" bIns="0" rtlCol="0" anchor="ctr"/>
-          <a:lstStyle/>
-          <a:p>
-            <a:pPr marL="0" indent="0" algn="ctr">
-              <a:buNone/>
-            </a:pPr>
-            <a:r>
-              <a:rPr lang="en-US" sz="1100" b="1" dirty="0">
-                <a:solidFill>
-                  <a:srgbClr val="60A5FA"/>
-                </a:solidFill>
-                <a:latin typeface="Noto Sans KR" pitchFamily="34" charset="0"/>
-                <a:ea typeface="Noto Sans KR" pitchFamily="34" charset="-122"/>
-                <a:cs typeface="Noto Sans KR" pitchFamily="34" charset="-120"/>
-              </a:rPr>
-              <a:t>40-65분</a:t>
-            </a:r>
-            <a:endParaRPr lang="en-US" sz="1100" dirty="0"/>
-          </a:p>
-        </p:txBody>
-      </p:sp>
-      <p:sp>
-        <p:nvSpPr>
-          <p:cNvPr id="54" name="Text 46"/>
-          <p:cNvSpPr txBox="1"/>
-          <p:nvPr/>
-        </p:nvSpPr>
-        <p:spPr>
-          <a:xfrm>
-            <a:off x="1155802" y="4401007"/>
-            <a:ext cx="606247" cy="200254"/>
-          </a:xfrm>
-          <a:prstGeom prst="rect">
-            <a:avLst/>
-          </a:prstGeom>
-          <a:noFill/>
-          <a:ln/>
-        </p:spPr>
-        <p:txBody>
-          <a:bodyPr wrap="square" lIns="0" tIns="0" rIns="0" bIns="0" rtlCol="0" anchor="ctr"/>
-          <a:lstStyle/>
-          <a:p>
-            <a:pPr marL="0" indent="0" algn="ctr">
-              <a:buNone/>
-            </a:pPr>
-            <a:r>
-              <a:rPr lang="en-US" sz="1100" b="1" dirty="0">
-                <a:solidFill>
-                  <a:srgbClr val="60A5FA"/>
-                </a:solidFill>
-                <a:latin typeface="Noto Sans KR" pitchFamily="34" charset="0"/>
-                <a:ea typeface="Noto Sans KR" pitchFamily="34" charset="-122"/>
-                <a:cs typeface="Noto Sans KR" pitchFamily="34" charset="-120"/>
-              </a:rPr>
-              <a:t>65-75분</a:t>
-            </a:r>
-            <a:endParaRPr lang="en-US" sz="1100" dirty="0"/>
-          </a:p>
-        </p:txBody>
-      </p:sp>
-      <p:sp>
-        <p:nvSpPr>
-          <p:cNvPr id="55" name="Text 47"/>
-          <p:cNvSpPr txBox="1"/>
-          <p:nvPr/>
-        </p:nvSpPr>
-        <p:spPr>
-          <a:xfrm>
-            <a:off x="1155802" y="5048402"/>
-            <a:ext cx="606247" cy="200254"/>
-          </a:xfrm>
-          <a:prstGeom prst="rect">
-            <a:avLst/>
-          </a:prstGeom>
-          <a:noFill/>
-          <a:ln/>
-        </p:spPr>
-        <p:txBody>
-          <a:bodyPr wrap="square" lIns="0" tIns="0" rIns="0" bIns="0" rtlCol="0" anchor="ctr"/>
-          <a:lstStyle/>
-          <a:p>
-            <a:pPr marL="0" indent="0" algn="ctr">
-              <a:buNone/>
-            </a:pPr>
-            <a:r>
-              <a:rPr lang="en-US" sz="1100" b="1" dirty="0">
-                <a:solidFill>
-                  <a:srgbClr val="60A5FA"/>
-                </a:solidFill>
-                <a:latin typeface="Noto Sans KR" pitchFamily="34" charset="0"/>
-                <a:ea typeface="Noto Sans KR" pitchFamily="34" charset="-122"/>
-                <a:cs typeface="Noto Sans KR" pitchFamily="34" charset="-120"/>
-              </a:rPr>
-              <a:t>75-90분</a:t>
-            </a:r>
-            <a:endParaRPr lang="en-US" sz="1100" dirty="0"/>
-          </a:p>
-        </p:txBody>
-      </p:sp>
-      <p:sp>
-        <p:nvSpPr>
-          <p:cNvPr id="56" name="deckgen:wrap:footer"/>
+          <p:cNvPr id="51" name="deckgen:wrap:footer"/>
           <p:cNvSpPr txBox="1"/>
           <p:nvPr/>
         </p:nvSpPr>
@@ -24606,7 +23642,7 @@
                 </a:solidFill>
                 <a:latin typeface="Pretendard"/>
               </a:rPr>
-              <a:t>© 2026 이애본(드림아이티비즈) · useful-ai.dreamitbiz.com · 교육 목적 비영리 이용 · 출처 표기</a:t>
+              <a:t>© 2026 이애본 · 홍문원(洪文院) 발행 · CC BY-NC-ND 4.0 · useful-ai.dreamitbiz.com</a:t>
             </a:r>
           </a:p>
         </p:txBody>
@@ -24781,45 +23817,6 @@
               <a:t>디자인씽킹 6단계 개요</a:t>
             </a:r>
             <a:endParaRPr lang="en-US" sz="2800" dirty="0"/>
-          </a:p>
-        </p:txBody>
-      </p:sp>
-      <p:sp>
-        <p:nvSpPr>
-          <p:cNvPr id="7" name="Text 5"/>
-          <p:cNvSpPr txBox="1"/>
-          <p:nvPr/>
-        </p:nvSpPr>
-        <p:spPr>
-          <a:xfrm>
-            <a:off x="10863072" y="761695"/>
-            <a:ext cx="663854" cy="228600"/>
-          </a:xfrm>
-          <a:prstGeom prst="rect">
-            <a:avLst/>
-          </a:prstGeom>
-          <a:noFill/>
-          <a:ln/>
-        </p:spPr>
-        <p:txBody>
-          <a:bodyPr wrap="square" lIns="0" tIns="0" rIns="0" bIns="0" rtlCol="0" anchor="ctr"/>
-          <a:lstStyle/>
-          <a:p>
-            <a:pPr marL="0" indent="0" algn="l">
-              <a:buNone/>
-            </a:pPr>
-            <a:r>
-              <a:rPr lang="en-US" sz="1200" dirty="0">
-                <a:solidFill>
-                  <a:srgbClr val="64748B"/>
-                </a:solidFill>
-                <a:latin typeface="Noto Sans KR" pitchFamily="34" charset="0"/>
-                <a:ea typeface="Noto Sans KR" pitchFamily="34" charset="-122"/>
-                <a:cs typeface="Noto Sans KR" pitchFamily="34" charset="-120"/>
-              </a:rPr>
-              <a:t>Page 05</a:t>
-            </a:r>
-            <a:endParaRPr lang="en-US" sz="1200" dirty="0"/>
           </a:p>
         </p:txBody>
       </p:sp>
@@ -26219,7 +25216,7 @@
                   <a:ea typeface="Noto Sans KR" pitchFamily="34" charset="-122"/>
                   <a:cs typeface="Noto Sans KR" pitchFamily="34" charset="-120"/>
                 </a:rPr>
-                <a:t>Realize</a:t>
+                <a:t>Implement</a:t>
               </a:r>
               <a:endParaRPr lang="en-US" sz="1200" dirty="0"/>
             </a:p>
@@ -26395,7 +25392,7 @@
                 <a:ea typeface="Noto Sans KR" pitchFamily="34" charset="-122"/>
                 <a:cs typeface="Noto Sans KR" pitchFamily="34" charset="-120"/>
               </a:rPr>
-              <a:t>본 강의에서는</a:t>
+              <a:t>본 강의에서는 </a:t>
             </a:r>
             <a:r>
               <a:rPr lang="en-US" sz="1200" b="1" dirty="0">
@@ -26492,7 +25489,43 @@
       </p:pic>
       <p:sp>
         <p:nvSpPr>
-          <p:cNvPr id="62" name="deckgen:wrap:footer"/>
+          <p:cNvPr id="62" name="Stage3 Note"/>
+          <p:cNvSpPr txBox="1"/>
+          <p:nvPr/>
+        </p:nvSpPr>
+        <p:spPr>
+          <a:xfrm>
+            <a:off x="571500" y="6420000"/>
+            <a:ext cx="11049000" cy="300000"/>
+          </a:xfrm>
+          <a:prstGeom prst="rect">
+            <a:avLst/>
+          </a:prstGeom>
+          <a:noFill/>
+        </p:spPr>
+        <p:txBody>
+          <a:bodyPr wrap="square" lIns="0" rIns="0" tIns="0" bIns="0" anchor="t">
+            <a:spAutoFit/>
+          </a:bodyPr>
+          <a:lstStyle/>
+          <a:p>
+            <a:r>
+              <a:rPr sz="900">
+                <a:solidFill>
+                  <a:srgbClr val="8B95A7"/>
+                </a:solidFill>
+                <a:latin typeface="Noto Sans KR"/>
+                <a:ea typeface="Noto Sans KR"/>
+                <a:cs typeface="Noto Sans KR"/>
+              </a:rPr>
+              <a:t>6단계 구성은 Gibbons(2016)를 따른다. 스탠퍼드 d.school 은 공감~테스트의 5단계로 설명한다(Design Thinking Bootleg).  Gibbons, S. (2016). Design thinking 101. Nielsen Norman Group. https://www.nngroup.com/articles/design-thinking/</a:t>
+            </a:r>
+          </a:p>
+        </p:txBody>
+      </p:sp>
+      <p:sp>
+        <p:nvSpPr>
+          <p:cNvPr id="63" name="deckgen:wrap:footer"/>
           <p:cNvSpPr txBox="1"/>
           <p:nvPr/>
         </p:nvSpPr>
@@ -26524,7 +25557,7 @@
                 </a:solidFill>
                 <a:latin typeface="Pretendard"/>
               </a:rPr>
-              <a:t>© 2026 이애본(드림아이티비즈) · useful-ai.dreamitbiz.com · 교육 목적 비영리 이용 · 출처 표기</a:t>
+              <a:t>© 2026 이애본 · 홍문원(洪文院) 발행 · CC BY-NC-ND 4.0 · useful-ai.dreamitbiz.com</a:t>
             </a:r>
           </a:p>
         </p:txBody>
@@ -27587,7 +26620,7 @@
                 </a:solidFill>
                 <a:latin typeface="Pretendard"/>
               </a:rPr>
-              <a:t>© 2026 이애본(드림아이티비즈) · useful-ai.dreamitbiz.com · 교육 목적 비영리 이용 · 출처 표기</a:t>
+              <a:t>© 2026 이애본 · 홍문원(洪文院) 발행 · CC BY-NC-ND 4.0 · useful-ai.dreamitbiz.com</a:t>
             </a:r>
           </a:p>
         </p:txBody>
@@ -27819,45 +26852,6 @@
       </p:pic>
       <p:sp>
         <p:nvSpPr>
-          <p:cNvPr id="8" name="Text 5"/>
-          <p:cNvSpPr txBox="1"/>
-          <p:nvPr/>
-        </p:nvSpPr>
-        <p:spPr>
-          <a:xfrm>
-            <a:off x="10792663" y="580644"/>
-            <a:ext cx="746150" cy="257861"/>
-          </a:xfrm>
-          <a:prstGeom prst="rect">
-            <a:avLst/>
-          </a:prstGeom>
-          <a:noFill/>
-          <a:ln/>
-        </p:spPr>
-        <p:txBody>
-          <a:bodyPr wrap="square" lIns="0" tIns="0" rIns="0" bIns="0" rtlCol="0" anchor="ctr"/>
-          <a:lstStyle/>
-          <a:p>
-            <a:pPr marL="0" indent="0" algn="l">
-              <a:buNone/>
-            </a:pPr>
-            <a:r>
-              <a:rPr lang="en-US" sz="1300" dirty="0">
-                <a:solidFill>
-                  <a:srgbClr val="64748B"/>
-                </a:solidFill>
-                <a:latin typeface="Noto Sans KR" pitchFamily="34" charset="0"/>
-                <a:ea typeface="Noto Sans KR" pitchFamily="34" charset="-122"/>
-                <a:cs typeface="Noto Sans KR" pitchFamily="34" charset="-120"/>
-              </a:rPr>
-              <a:t>Page 07</a:t>
-            </a:r>
-            <a:endParaRPr lang="en-US" sz="1300" dirty="0"/>
-          </a:p>
-        </p:txBody>
-      </p:sp>
-      <p:sp>
-        <p:nvSpPr>
           <p:cNvPr id="9" name="Text 6"/>
           <p:cNvSpPr txBox="1"/>
           <p:nvPr/>
@@ -28655,7 +27649,7 @@
                 <a:ea typeface="Noto Sans KR" pitchFamily="34" charset="-122"/>
                 <a:cs typeface="Noto Sans KR" pitchFamily="34" charset="-120"/>
               </a:rPr>
-              <a:t>공감 (동일시)</a:t>
+              <a:t>공감 (상대 입장에서 느끼기)</a:t>
             </a:r>
             <a:endParaRPr lang="en-US" sz="1200" dirty="0"/>
           </a:p>
@@ -29239,7 +28233,7 @@
                 <a:ea typeface="Noto Sans KR" pitchFamily="34" charset="-122"/>
                 <a:cs typeface="Noto Sans KR" pitchFamily="34" charset="-120"/>
               </a:rPr>
-              <a:t>주의:</a:t>
+              <a:t>주의: </a:t>
             </a:r>
             <a:r>
               <a:rPr lang="en-US" sz="900" dirty="0">
@@ -29510,7 +28504,7 @@
                 </a:solidFill>
                 <a:latin typeface="Pretendard"/>
               </a:rPr>
-              <a:t>© 2026 이애본(드림아이티비즈) · useful-ai.dreamitbiz.com · 교육 목적 비영리 이용 · 출처 표기</a:t>
+              <a:t>© 2026 이애본 · 홍문원(洪文院) 발행 · CC BY-NC-ND 4.0 · useful-ai.dreamitbiz.com</a:t>
             </a:r>
           </a:p>
         </p:txBody>
@@ -31459,7 +30453,7 @@
                 <a:ea typeface="Noto Sans KR" pitchFamily="34" charset="-122"/>
                 <a:cs typeface="Noto Sans KR" pitchFamily="34" charset="-120"/>
               </a:rPr>
-              <a:t>Says:</a:t>
+              <a:t>Says: </a:t>
             </a:r>
             <a:r>
               <a:rPr lang="en-US" sz="1000" dirty="0">
@@ -31541,7 +30535,7 @@
                 <a:ea typeface="Noto Sans KR" pitchFamily="34" charset="-122"/>
                 <a:cs typeface="Noto Sans KR" pitchFamily="34" charset="-120"/>
               </a:rPr>
-              <a:t>Thinks:</a:t>
+              <a:t>Thinks: </a:t>
             </a:r>
             <a:r>
               <a:rPr lang="en-US" sz="1000" dirty="0">
@@ -31623,7 +30617,7 @@
                 <a:ea typeface="Noto Sans KR" pitchFamily="34" charset="-122"/>
                 <a:cs typeface="Noto Sans KR" pitchFamily="34" charset="-120"/>
               </a:rPr>
-              <a:t>Does:</a:t>
+              <a:t>Does: </a:t>
             </a:r>
             <a:r>
               <a:rPr lang="en-US" sz="1000" dirty="0">
@@ -31705,7 +30699,7 @@
                 <a:ea typeface="Noto Sans KR" pitchFamily="34" charset="-122"/>
                 <a:cs typeface="Noto Sans KR" pitchFamily="34" charset="-120"/>
               </a:rPr>
-              <a:t>Feels:</a:t>
+              <a:t>Feels: </a:t>
             </a:r>
             <a:r>
               <a:rPr lang="en-US" sz="1000" dirty="0">
@@ -32309,7 +31303,7 @@
                 </a:solidFill>
                 <a:latin typeface="Pretendard"/>
               </a:rPr>
-              <a:t>© 2026 이애본(드림아이티비즈) · useful-ai.dreamitbiz.com · 교육 목적 비영리 이용 · 출처 표기</a:t>
+              <a:t>© 2026 이애본 · 홍문원(洪文院) 발행 · CC BY-NC-ND 4.0 · useful-ai.dreamitbiz.com</a:t>
             </a:r>
           </a:p>
         </p:txBody>
@@ -32521,45 +31515,6 @@
       </p:sp>
       <p:sp>
         <p:nvSpPr>
-          <p:cNvPr id="7" name="Text 5"/>
-          <p:cNvSpPr txBox="1"/>
-          <p:nvPr/>
-        </p:nvSpPr>
-        <p:spPr>
-          <a:xfrm>
-            <a:off x="10863072" y="752551"/>
-            <a:ext cx="663854" cy="228600"/>
-          </a:xfrm>
-          <a:prstGeom prst="rect">
-            <a:avLst/>
-          </a:prstGeom>
-          <a:noFill/>
-          <a:ln/>
-        </p:spPr>
-        <p:txBody>
-          <a:bodyPr wrap="square" lIns="0" tIns="0" rIns="0" bIns="0" rtlCol="0" anchor="ctr"/>
-          <a:lstStyle/>
-          <a:p>
-            <a:pPr marL="0" indent="0" algn="l">
-              <a:buNone/>
-            </a:pPr>
-            <a:r>
-              <a:rPr lang="en-US" sz="1200" dirty="0">
-                <a:solidFill>
-                  <a:srgbClr val="64748B"/>
-                </a:solidFill>
-                <a:latin typeface="Noto Sans KR" pitchFamily="34" charset="0"/>
-                <a:ea typeface="Noto Sans KR" pitchFamily="34" charset="-122"/>
-                <a:cs typeface="Noto Sans KR" pitchFamily="34" charset="-120"/>
-              </a:rPr>
-              <a:t>Page 09</a:t>
-            </a:r>
-            <a:endParaRPr lang="en-US" sz="1200" dirty="0"/>
-          </a:p>
-        </p:txBody>
-      </p:sp>
-      <p:sp>
-        <p:nvSpPr>
           <p:cNvPr id="8" name="Shape 6"/>
           <p:cNvSpPr/>
           <p:nvPr/>
@@ -33083,7 +32038,7 @@
                 <a:ea typeface="Noto Sans KR" pitchFamily="34" charset="-122"/>
                 <a:cs typeface="Noto Sans KR" pitchFamily="34" charset="-120"/>
               </a:rPr>
-              <a:t>단순 현상이 아닌</a:t>
+              <a:t>단순 현상이 아닌 </a:t>
             </a:r>
             <a:r>
               <a:rPr lang="en-US" sz="1100" b="1" dirty="0">
@@ -34642,7 +33597,7 @@
                 </a:solidFill>
                 <a:latin typeface="Pretendard"/>
               </a:rPr>
-              <a:t>© 2026 이애본(드림아이티비즈) · useful-ai.dreamitbiz.com · 교육 목적 비영리 이용 · 출처 표기</a:t>
+              <a:t>© 2026 이애본 · 홍문원(洪文院) 발행 · CC BY-NC-ND 4.0 · useful-ai.dreamitbiz.com</a:t>
             </a:r>
           </a:p>
         </p:txBody>

--- a/library/b02-design-thinking/b02-design-thinking.pptx
+++ b/library/b02-design-thinking/b02-design-thinking.pptx
@@ -14690,7 +14690,7 @@
         <p:spPr>
           <a:xfrm>
             <a:off x="790956" y="4727448"/>
-            <a:ext cx="913778" cy="173295"/>
+            <a:ext cx="1667676" cy="173295"/>
           </a:xfrm>
           <a:prstGeom prst="rect">
             <a:avLst/>
@@ -14738,7 +14738,7 @@
         <p:spPr>
           <a:xfrm>
             <a:off x="790955" y="4912157"/>
-            <a:ext cx="774903" cy="173295"/>
+            <a:ext cx="1667676" cy="173295"/>
           </a:xfrm>
           <a:prstGeom prst="rect">
             <a:avLst/>
@@ -14882,7 +14882,7 @@
         <p:spPr>
           <a:xfrm>
             <a:off x="790956" y="5574182"/>
-            <a:ext cx="1413264" cy="173295"/>
+            <a:ext cx="1667676" cy="173295"/>
           </a:xfrm>
           <a:prstGeom prst="rect">
             <a:avLst/>
@@ -14930,7 +14930,7 @@
         <p:spPr>
           <a:xfrm>
             <a:off x="790956" y="5785802"/>
-            <a:ext cx="839090" cy="173295"/>
+            <a:ext cx="1667676" cy="173295"/>
           </a:xfrm>
           <a:prstGeom prst="rect">
             <a:avLst/>
@@ -14978,7 +14978,7 @@
         <p:spPr>
           <a:xfrm>
             <a:off x="790956" y="5987451"/>
-            <a:ext cx="596348" cy="173295"/>
+            <a:ext cx="1667676" cy="173295"/>
           </a:xfrm>
           <a:prstGeom prst="rect">
             <a:avLst/>
@@ -15026,7 +15026,7 @@
         <p:spPr>
           <a:xfrm>
             <a:off x="790955" y="6204514"/>
-            <a:ext cx="717719" cy="173295"/>
+            <a:ext cx="1667676" cy="173295"/>
           </a:xfrm>
           <a:prstGeom prst="rect">
             <a:avLst/>
@@ -15215,7 +15215,7 @@
         <p:spPr>
           <a:xfrm>
             <a:off x="2695651" y="4727448"/>
-            <a:ext cx="1328071" cy="173295"/>
+            <a:ext cx="1667676" cy="173295"/>
           </a:xfrm>
           <a:prstGeom prst="rect">
             <a:avLst/>
@@ -15263,7 +15263,7 @@
         <p:spPr>
           <a:xfrm>
             <a:off x="2695651" y="4912157"/>
-            <a:ext cx="1134346" cy="173295"/>
+            <a:ext cx="1667676" cy="173295"/>
           </a:xfrm>
           <a:prstGeom prst="rect">
             <a:avLst/>
@@ -15407,7 +15407,7 @@
         <p:spPr>
           <a:xfrm>
             <a:off x="2695651" y="5574182"/>
-            <a:ext cx="913778" cy="173295"/>
+            <a:ext cx="1667676" cy="173295"/>
           </a:xfrm>
           <a:prstGeom prst="rect">
             <a:avLst/>
@@ -15455,7 +15455,7 @@
         <p:spPr>
           <a:xfrm>
             <a:off x="2695651" y="5720486"/>
-            <a:ext cx="913778" cy="173295"/>
+            <a:ext cx="1667676" cy="173295"/>
           </a:xfrm>
           <a:prstGeom prst="rect">
             <a:avLst/>
@@ -15644,7 +15644,7 @@
         <p:spPr>
           <a:xfrm>
             <a:off x="4600346" y="4727448"/>
-            <a:ext cx="596348" cy="173295"/>
+            <a:ext cx="1667676" cy="173295"/>
           </a:xfrm>
           <a:prstGeom prst="rect">
             <a:avLst/>
@@ -15692,7 +15692,7 @@
         <p:spPr>
           <a:xfrm>
             <a:off x="4600346" y="4912157"/>
-            <a:ext cx="596348" cy="173295"/>
+            <a:ext cx="1667676" cy="173295"/>
           </a:xfrm>
           <a:prstGeom prst="rect">
             <a:avLst/>
@@ -15740,7 +15740,7 @@
         <p:spPr>
           <a:xfrm>
             <a:off x="4600346" y="5096866"/>
-            <a:ext cx="839090" cy="173295"/>
+            <a:ext cx="1667676" cy="173295"/>
           </a:xfrm>
           <a:prstGeom prst="rect">
             <a:avLst/>
@@ -15884,7 +15884,7 @@
         <p:spPr>
           <a:xfrm>
             <a:off x="4600345" y="5758891"/>
-            <a:ext cx="1051487" cy="173295"/>
+            <a:ext cx="1667676" cy="173295"/>
           </a:xfrm>
           <a:prstGeom prst="rect">
             <a:avLst/>
@@ -15932,7 +15932,7 @@
         <p:spPr>
           <a:xfrm>
             <a:off x="4600346" y="5975954"/>
-            <a:ext cx="1468114" cy="173295"/>
+            <a:ext cx="1667676" cy="173295"/>
           </a:xfrm>
           <a:prstGeom prst="rect">
             <a:avLst/>
@@ -15980,7 +15980,7 @@
         <p:spPr>
           <a:xfrm>
             <a:off x="4600346" y="6183046"/>
-            <a:ext cx="913778" cy="173295"/>
+            <a:ext cx="1667676" cy="173295"/>
           </a:xfrm>
           <a:prstGeom prst="rect">
             <a:avLst/>
@@ -16169,7 +16169,7 @@
         <p:spPr>
           <a:xfrm>
             <a:off x="6505956" y="4727448"/>
-            <a:ext cx="637194" cy="173295"/>
+            <a:ext cx="1667676" cy="173295"/>
           </a:xfrm>
           <a:prstGeom prst="rect">
             <a:avLst/>
@@ -16217,7 +16217,7 @@
         <p:spPr>
           <a:xfrm>
             <a:off x="6505956" y="4912157"/>
-            <a:ext cx="637194" cy="173295"/>
+            <a:ext cx="1667676" cy="173295"/>
           </a:xfrm>
           <a:prstGeom prst="rect">
             <a:avLst/>
@@ -16265,7 +16265,7 @@
         <p:spPr>
           <a:xfrm>
             <a:off x="6505955" y="5096866"/>
-            <a:ext cx="1097001" cy="173295"/>
+            <a:ext cx="1667676" cy="173295"/>
           </a:xfrm>
           <a:prstGeom prst="rect">
             <a:avLst/>
@@ -16454,7 +16454,7 @@
         <p:spPr>
           <a:xfrm>
             <a:off x="8410650" y="4727448"/>
-            <a:ext cx="1051487" cy="173295"/>
+            <a:ext cx="1667676" cy="173295"/>
           </a:xfrm>
           <a:prstGeom prst="rect">
             <a:avLst/>
@@ -16502,7 +16502,7 @@
         <p:spPr>
           <a:xfrm>
             <a:off x="8410651" y="4912157"/>
-            <a:ext cx="913778" cy="173295"/>
+            <a:ext cx="1667676" cy="173295"/>
           </a:xfrm>
           <a:prstGeom prst="rect">
             <a:avLst/>
@@ -16550,7 +16550,7 @@
         <p:spPr>
           <a:xfrm>
             <a:off x="8410650" y="5096866"/>
-            <a:ext cx="1051487" cy="173295"/>
+            <a:ext cx="1667676" cy="173295"/>
           </a:xfrm>
           <a:prstGeom prst="rect">
             <a:avLst/>
@@ -16598,7 +16598,7 @@
         <p:spPr>
           <a:xfrm>
             <a:off x="8410651" y="5281574"/>
-            <a:ext cx="1357247" cy="173295"/>
+            <a:ext cx="1667676" cy="173295"/>
           </a:xfrm>
           <a:prstGeom prst="rect">
             <a:avLst/>

--- a/library/b02-design-thinking/b02-design-thinking.pptx
+++ b/library/b02-design-thinking/b02-design-thinking.pptx
@@ -19202,7 +19202,7 @@
                 </a:solidFill>
                 <a:latin typeface="Pretendard"/>
               </a:rPr>
-              <a:t>1.  저작권 © 2026 이애본(드림아이티비즈 DreamIT Biz). 발행 홍문원(洪文院, 출판사 신고번호 제2026-000026호). 2026년 1월 「생성형 AI와 창의력·복합문제능력 향상 과정」 강의안을 전자출판용으로 다시 묶은 것입니다. ISBN: 등록 후 기재.</a:t>
+              <a:t>1.  저작권 © 2026 이애본(드림아이티비즈 DreamIT Biz). 발행 홍문원(洪文院, 출판사 신고번호 제2026-000026호). 이애본이 2026년 대학·기관 강의 현장에서 쓴 강의안을 전자출판용으로 다시 묶은 것입니다. ISBN: 등록 후 기재.</a:t>
             </a:r>
           </a:p>
           <a:p>
